--- a/example/trae_DeepSeek-V4.1-Flash_个人信息介绍.pptx
+++ b/example/trae_DeepSeek-V4.1-Flash_个人信息介绍.pptx
@@ -925,7 +925,7 @@
           <a:lstStyle/>
           <a:p>
             <a:r>
-              <a:t>收尾落在开源上：Haute 把 GSAP 动效蒸馏成六大风格体系、十二种模式与十节引擎纪律，并打通四路分发；Universal PPT 把 17 个开源 skill 收敛成六类场景、30 多种风格与 8 条渲染路径。两套均为 MIT。</a:t>
+              <a:t>收尾落在开源上：Haute 把 GSAP 动效提炼成六大风格体系、十二种模式与十节引擎纪律，并打通四路分发；Universal PPT 把 17 个开源 skill 收敛成六类场景、30 多种风格与 8 条渲染路径。两套均为 MIT。</a:t>
             </a:r>
           </a:p>
         </p:txBody>
@@ -1415,7 +1415,7 @@
           <a:lstStyle/>
           <a:p>
             <a:r>
-              <a:t>这一页是可核查的数字索引：火点预测 R² 0.971、NDVI 0.801、推荐精确率 0.96 与 0.99、LangGraph 8 节点、四级防御判定、17 项大屏功能、Gitee 三星、17 个开源 skill 的蒸馏规模。</a:t>
+              <a:t>这一页是可核查的数字索引：火点预测 R² 0.971、NDVI 0.801、推荐精确率 0.96 与 0.99、LangGraph 8 节点、四级防御判定、17 项大屏功能、Gitee 三星、17 个开源 skill 的提炼规模。</a:t>
             </a:r>
           </a:p>
         </p:txBody>
@@ -5204,7 +5204,7 @@
                 <a:latin typeface="微软雅黑"/>
                 <a:ea typeface="微软雅黑"/>
               </a:rPr>
-              <a:t>蒸馏 GSAP 官方 skills，产出 6 大风格体系 + 12 动效模式 + 10 节引擎纪律 + 12+ 即贴配方，skills CLI / Claude / Cursor / Copilot 四路分发全部合规打通（MIT）</a:t>
+              <a:t>提炼 GSAP 官方 skills，产出 6 大风格体系 + 12 动效模式 + 10 节引擎纪律 + 12+ 即贴配方，skills CLI / Claude / Cursor / Copilot 四路分发全部合规打通（MIT）</a:t>
             </a:r>
           </a:p>
         </p:txBody>
@@ -5330,7 +5330,7 @@
                 <a:latin typeface="微软雅黑"/>
                 <a:ea typeface="微软雅黑"/>
               </a:rPr>
-              <a:t>蒸馏 17 个开源 PPT skill，建成六类场景路由 × 30+ 风格库 × 8 条渲染路径，并配内容—视觉—溯源三道质检闸（MIT）</a:t>
+              <a:t>提炼 17 个开源 PPT skill，建成六类场景路由 × 30+ 风格库 × 8 条渲染路径，并配内容—视觉—溯源三道质检闸（MIT）</a:t>
             </a:r>
           </a:p>
         </p:txBody>
@@ -10127,7 +10127,7 @@
                 <a:latin typeface="微软雅黑"/>
                 <a:ea typeface="微软雅黑"/>
               </a:rPr>
-              <a:t>技能蒸馏</a:t>
+              <a:t>技能提炼</a:t>
             </a:r>
           </a:p>
         </p:txBody>
